--- a/wedding-deck/build/結婚式_2択クイズ＆ビンゴ.pptx
+++ b/wedding-deck/build/結婚式_2択クイズ＆ビンゴ.pptx
@@ -50,7 +50,6 @@
     <p:sldId id="298" r:id="rId50"/>
     <p:sldId id="299" r:id="rId51"/>
     <p:sldId id="300" r:id="rId52"/>
-    <p:sldId id="301" r:id="rId53"/>
   </p:sldIdLst>
   <p:sldSz cx="12192000" cy="6858000" type="screen4x3"/>
   <p:notesSz cx="6858000" cy="9144000"/>
@@ -2303,7 +2302,7 @@
           <a:lstStyle/>
           <a:p>
             <a:r>
-              <a:t>最後まで残った方をその場で読み上げ、前へお呼びしてください。</a:t>
+              <a:t>表彰はせず、その場で拍手して次へ進む想定です。</a:t>
             </a:r>
           </a:p>
         </p:txBody>
@@ -36305,7 +36304,7 @@
                 </a:solidFill>
                 <a:latin typeface="Meiryo"/>
               </a:rPr>
-              <a:t>最後まで勝ち残ったのは…？</a:t>
+              <a:t>最後まで残った方に、大きな拍手を👏</a:t>
             </a:r>
           </a:p>
         </p:txBody>
@@ -36450,206 +36449,6 @@
       <p:grpSpPr/>
       <p:pic>
         <p:nvPicPr>
-          <p:cNvPr id="2" name="Picture 1" descr="bg_quiz.png"/>
-          <p:cNvPicPr>
-            <a:picLocks noChangeAspect="1"/>
-          </p:cNvPicPr>
-          <p:nvPr/>
-        </p:nvPicPr>
-        <p:blipFill>
-          <a:blip r:embed="rId2"/>
-          <a:stretch>
-            <a:fillRect/>
-          </a:stretch>
-        </p:blipFill>
-        <p:spPr>
-          <a:xfrm>
-            <a:off x="0" y="0"/>
-            <a:ext cx="12192000" cy="6858000"/>
-          </a:xfrm>
-          <a:prstGeom prst="rect">
-            <a:avLst/>
-          </a:prstGeom>
-        </p:spPr>
-      </p:pic>
-      <p:sp>
-        <p:nvSpPr>
-          <p:cNvPr id="3" name="Rounded Rectangle 2"/>
-          <p:cNvSpPr/>
-          <p:nvPr/>
-        </p:nvSpPr>
-        <p:spPr>
-          <a:xfrm>
-            <a:off x="620000" y="300000"/>
-            <a:ext cx="2500000" cy="820000"/>
-          </a:xfrm>
-          <a:prstGeom prst="roundRect">
-            <a:avLst>
-              <a:gd name="adj" fmla="val 50000"/>
-            </a:avLst>
-          </a:prstGeom>
-          <a:solidFill>
-            <a:srgbClr val="962C42"/>
-          </a:solidFill>
-          <a:ln w="38100">
-            <a:solidFill>
-              <a:srgbClr val="C9A227"/>
-            </a:solidFill>
-          </a:ln>
-          <a:effectLst/>
-        </p:spPr>
-        <p:style>
-          <a:lnRef idx="1">
-            <a:schemeClr val="accent1"/>
-          </a:lnRef>
-          <a:fillRef idx="3">
-            <a:schemeClr val="accent1"/>
-          </a:fillRef>
-          <a:effectRef idx="2">
-            <a:schemeClr val="accent1"/>
-          </a:effectRef>
-          <a:fontRef idx="minor">
-            <a:schemeClr val="lt1"/>
-          </a:fontRef>
-        </p:style>
-        <p:txBody>
-          <a:bodyPr rtlCol="0" anchor="ctr" wrap="square" tIns="45000" bIns="45000"/>
-          <a:lstStyle/>
-          <a:p>
-            <a:pPr algn="ctr">
-              <a:lnSpc>
-                <a:spcPct val="105000"/>
-              </a:lnSpc>
-            </a:pPr>
-            <a:r>
-              <a:rPr sz="2400" b="1">
-                <a:solidFill>
-                  <a:srgbClr val="FFFFFF"/>
-                </a:solidFill>
-                <a:latin typeface="Meiryo"/>
-              </a:rPr>
-              <a:t>結果発表</a:t>
-            </a:r>
-          </a:p>
-        </p:txBody>
-      </p:sp>
-      <p:sp>
-        <p:nvSpPr>
-          <p:cNvPr id="4" name="TextBox 3"/>
-          <p:cNvSpPr txBox="1"/>
-          <p:nvPr/>
-        </p:nvSpPr>
-        <p:spPr>
-          <a:xfrm>
-            <a:off x="900000" y="1250000"/>
-            <a:ext cx="10392000" cy="1000000"/>
-          </a:xfrm>
-          <a:prstGeom prst="rect">
-            <a:avLst/>
-          </a:prstGeom>
-          <a:noFill/>
-        </p:spPr>
-        <p:txBody>
-          <a:bodyPr wrap="square" anchor="ctr" lIns="90000" rIns="90000" tIns="45000" bIns="45000">
-            <a:spAutoFit/>
-          </a:bodyPr>
-          <a:lstStyle/>
-          <a:p>
-            <a:pPr algn="ctr">
-              <a:lnSpc>
-                <a:spcPct val="118000"/>
-              </a:lnSpc>
-            </a:pPr>
-            <a:r>
-              <a:rPr sz="4000" b="1" lang="ja-JP" altLang="en-US">
-                <a:solidFill>
-                  <a:srgbClr val="962C42"/>
-                </a:solidFill>
-                <a:latin typeface="Meiryo"/>
-              </a:rPr>
-              <a:t>優勝！</a:t>
-            </a:r>
-          </a:p>
-        </p:txBody>
-      </p:sp>
-      <p:sp>
-        <p:nvSpPr>
-          <p:cNvPr id="5" name="TextBox 4"/>
-          <p:cNvSpPr txBox="1"/>
-          <p:nvPr/>
-        </p:nvSpPr>
-        <p:spPr>
-          <a:xfrm>
-            <a:off x="900000" y="2400000"/>
-            <a:ext cx="10392000" cy="2600000"/>
-          </a:xfrm>
-          <a:prstGeom prst="rect">
-            <a:avLst/>
-          </a:prstGeom>
-          <a:noFill/>
-        </p:spPr>
-        <p:txBody>
-          <a:bodyPr wrap="square" anchor="ctr" lIns="90000" rIns="90000" tIns="45000" bIns="45000">
-            <a:spAutoFit/>
-          </a:bodyPr>
-          <a:lstStyle/>
-          <a:p>
-            <a:pPr algn="ctr">
-              <a:lnSpc>
-                <a:spcPct val="118000"/>
-              </a:lnSpc>
-            </a:pPr>
-            <a:r>
-              <a:rPr sz="6000" b="1" lang="ja-JP" altLang="en-US">
-                <a:solidFill>
-                  <a:srgbClr val="962C42"/>
-                </a:solidFill>
-                <a:latin typeface="Meiryo"/>
-              </a:rPr>
-              <a:t>最後まで立っていた</a:t>
-            </a:r>
-          </a:p>
-          <a:p>
-            <a:pPr algn="ctr">
-              <a:lnSpc>
-                <a:spcPct val="118000"/>
-              </a:lnSpc>
-            </a:pPr>
-            <a:r>
-              <a:rPr sz="6000" b="1" lang="ja-JP" altLang="en-US">
-                <a:solidFill>
-                  <a:srgbClr val="962C42"/>
-                </a:solidFill>
-                <a:latin typeface="Meiryo"/>
-              </a:rPr>
-              <a:t>この方です！🎉</a:t>
-            </a:r>
-          </a:p>
-        </p:txBody>
-      </p:sp>
-    </p:spTree>
-  </p:cSld>
-  <p:clrMapOvr>
-    <a:masterClrMapping/>
-  </p:clrMapOvr>
-  <p:transition spd="med">
-    <p:fade/>
-  </p:transition>
-</p:sld>
-</file>
-
-<file path=ppt/slides/slide39.xml><?xml version="1.0" encoding="utf-8"?>
-<p:sld xmlns:a="http://schemas.openxmlformats.org/drawingml/2006/main" xmlns:p="http://schemas.openxmlformats.org/presentationml/2006/main" xmlns:r="http://schemas.openxmlformats.org/officeDocument/2006/relationships">
-  <p:cSld>
-    <p:spTree>
-      <p:nvGrpSpPr>
-        <p:cNvPr id="1" name=""/>
-        <p:cNvGrpSpPr/>
-        <p:nvPr/>
-      </p:nvGrpSpPr>
-      <p:grpSpPr/>
-      <p:pic>
-        <p:nvPicPr>
           <p:cNvPr id="2" name="Picture 1" descr="bg_title.png"/>
           <p:cNvPicPr>
             <a:picLocks noChangeAspect="1"/>
@@ -36922,6 +36721,246 @@
                 </p:cTn>
                 <p:tgtEl>
                   <p:spTgt spid="6"/>
+                </p:tgtEl>
+              </p:cMediaNode>
+            </p:audio>
+          </p:childTnLst>
+        </p:cTn>
+      </p:par>
+    </p:tnLst>
+  </p:timing>
+</p:sld>
+</file>
+
+<file path=ppt/slides/slide39.xml><?xml version="1.0" encoding="utf-8"?>
+<p:sld xmlns:a="http://schemas.openxmlformats.org/drawingml/2006/main" xmlns:p="http://schemas.openxmlformats.org/presentationml/2006/main" xmlns:r="http://schemas.openxmlformats.org/officeDocument/2006/relationships">
+  <p:cSld>
+    <p:spTree>
+      <p:nvGrpSpPr>
+        <p:cNvPr id="1" name=""/>
+        <p:cNvGrpSpPr/>
+        <p:nvPr/>
+      </p:nvGrpSpPr>
+      <p:grpSpPr/>
+      <p:pic>
+        <p:nvPicPr>
+          <p:cNvPr id="2" name="Picture 1" descr="bg_section.png"/>
+          <p:cNvPicPr>
+            <a:picLocks noChangeAspect="1"/>
+          </p:cNvPicPr>
+          <p:nvPr/>
+        </p:nvPicPr>
+        <p:blipFill>
+          <a:blip r:embed="rId2"/>
+          <a:stretch>
+            <a:fillRect/>
+          </a:stretch>
+        </p:blipFill>
+        <p:spPr>
+          <a:xfrm>
+            <a:off x="0" y="0"/>
+            <a:ext cx="12192000" cy="6858000"/>
+          </a:xfrm>
+          <a:prstGeom prst="rect">
+            <a:avLst/>
+          </a:prstGeom>
+        </p:spPr>
+      </p:pic>
+      <p:sp>
+        <p:nvSpPr>
+          <p:cNvPr id="3" name="TextBox 2"/>
+          <p:cNvSpPr txBox="1"/>
+          <p:nvPr/>
+        </p:nvSpPr>
+        <p:spPr>
+          <a:xfrm>
+            <a:off x="900000" y="2150000"/>
+            <a:ext cx="10392000" cy="1450000"/>
+          </a:xfrm>
+          <a:prstGeom prst="rect">
+            <a:avLst/>
+          </a:prstGeom>
+          <a:noFill/>
+        </p:spPr>
+        <p:txBody>
+          <a:bodyPr wrap="square" anchor="ctr" lIns="90000" rIns="90000" tIns="45000" bIns="45000">
+            <a:spAutoFit/>
+          </a:bodyPr>
+          <a:lstStyle/>
+          <a:p>
+            <a:pPr algn="ctr">
+              <a:lnSpc>
+                <a:spcPct val="118000"/>
+              </a:lnSpc>
+            </a:pPr>
+            <a:r>
+              <a:rPr sz="5600" b="1" lang="ja-JP" altLang="en-US">
+                <a:solidFill>
+                  <a:srgbClr val="FFFFFF"/>
+                </a:solidFill>
+                <a:latin typeface="Meiryo"/>
+              </a:rPr>
+              <a:t>ビンゴ大会</a:t>
+            </a:r>
+          </a:p>
+        </p:txBody>
+      </p:sp>
+      <p:sp>
+        <p:nvSpPr>
+          <p:cNvPr id="4" name="TextBox 3"/>
+          <p:cNvSpPr txBox="1"/>
+          <p:nvPr/>
+        </p:nvSpPr>
+        <p:spPr>
+          <a:xfrm>
+            <a:off x="900000" y="3750000"/>
+            <a:ext cx="10392000" cy="700000"/>
+          </a:xfrm>
+          <a:prstGeom prst="rect">
+            <a:avLst/>
+          </a:prstGeom>
+          <a:noFill/>
+        </p:spPr>
+        <p:txBody>
+          <a:bodyPr wrap="square" anchor="ctr" lIns="90000" rIns="90000" tIns="45000" bIns="45000">
+            <a:spAutoFit/>
+          </a:bodyPr>
+          <a:lstStyle/>
+          <a:p>
+            <a:pPr algn="ctr">
+              <a:lnSpc>
+                <a:spcPct val="118000"/>
+              </a:lnSpc>
+            </a:pPr>
+            <a:r>
+              <a:rPr sz="2200" b="0" lang="ja-JP" altLang="en-US">
+                <a:solidFill>
+                  <a:srgbClr val="F6DFC8"/>
+                </a:solidFill>
+                <a:latin typeface="Meiryo"/>
+              </a:rPr>
+              <a:t>お手元のカードをご用意ください🎱</a:t>
+            </a:r>
+          </a:p>
+        </p:txBody>
+      </p:sp>
+      <p:pic>
+        <p:nvPicPr>
+          <p:cNvPr id="5" name="セクション効果音">
+            <a:hlinkClick r:id="" action="ppaction://media"/>
+          </p:cNvPr>
+          <p:cNvPicPr>
+            <a:picLocks noChangeAspect="1"/>
+          </p:cNvPicPr>
+          <p:nvPr>
+            <a:audioFile r:link="rId4"/>
+            <p:extLst>
+              <p:ext uri="{DAA4B4D4-6D71-4841-9C94-3DE7FCFB9230}">
+                <p14:media xmlns:p14="http://schemas.microsoft.com/office/powerpoint/2010/main" r:embed="rId3"/>
+              </p:ext>
+            </p:extLst>
+          </p:nvPr>
+        </p:nvPicPr>
+        <p:blipFill>
+          <a:blip r:embed="rId5"/>
+          <a:stretch>
+            <a:fillRect/>
+          </a:stretch>
+        </p:blipFill>
+        <p:spPr>
+          <a:xfrm>
+            <a:off x="-900000" y="200000"/>
+            <a:ext cx="406400" cy="406400"/>
+          </a:xfrm>
+          <a:prstGeom prst="rect">
+            <a:avLst/>
+          </a:prstGeom>
+        </p:spPr>
+      </p:pic>
+    </p:spTree>
+  </p:cSld>
+  <p:clrMapOvr>
+    <a:masterClrMapping/>
+  </p:clrMapOvr>
+  <p:transition spd="med">
+    <p:fade/>
+  </p:transition>
+  <p:timing>
+    <p:tnLst>
+      <p:par>
+        <p:cTn id="1" dur="indefinite" restart="never" nodeType="tmRoot">
+          <p:childTnLst>
+            <p:seq concurrent="1" nextAc="seek">
+              <p:cTn id="2" dur="indefinite" nodeType="mainSeq">
+                <p:childTnLst>
+                  <p:par>
+                    <p:cTn id="3" fill="hold">
+                      <p:stCondLst>
+                        <p:cond delay="0"/>
+                      </p:stCondLst>
+                      <p:childTnLst>
+                        <p:par>
+                          <p:cTn id="4" fill="hold">
+                            <p:stCondLst>
+                              <p:cond delay="0"/>
+                            </p:stCondLst>
+                            <p:childTnLst>
+                              <p:par>
+                                <p:cTn id="5" presetID="1" presetClass="mediacall" presetSubtype="0" fill="hold" nodeType="clickEffect">
+                                  <p:stCondLst>
+                                    <p:cond delay="0"/>
+                                  </p:stCondLst>
+                                  <p:childTnLst>
+                                    <p:cmd type="call" cmd="playFrom(0.0)">
+                                      <p:cBhvr>
+                                        <p:cTn id="6" dur="8710" fill="hold"/>
+                                        <p:tgtEl>
+                                          <p:spTgt spid="5"/>
+                                        </p:tgtEl>
+                                      </p:cBhvr>
+                                    </p:cmd>
+                                  </p:childTnLst>
+                                </p:cTn>
+                              </p:par>
+                            </p:childTnLst>
+                          </p:cTn>
+                        </p:par>
+                      </p:childTnLst>
+                    </p:cTn>
+                  </p:par>
+                </p:childTnLst>
+              </p:cTn>
+              <p:prevCondLst>
+                <p:cond evt="onPrev" delay="0">
+                  <p:tgtEl>
+                    <p:sldTgt/>
+                  </p:tgtEl>
+                </p:cond>
+              </p:prevCondLst>
+              <p:nextCondLst>
+                <p:cond evt="onNext" delay="0">
+                  <p:tgtEl>
+                    <p:sldTgt/>
+                  </p:tgtEl>
+                </p:cond>
+              </p:nextCondLst>
+            </p:seq>
+            <p:audio>
+              <p:cMediaNode vol="80000">
+                <p:cTn id="7" fill="hold" display="0">
+                  <p:stCondLst>
+                    <p:cond delay="indefinite"/>
+                  </p:stCondLst>
+                  <p:endCondLst>
+                    <p:cond evt="onStopAudio" delay="0">
+                      <p:tgtEl>
+                        <p:sldTgt/>
+                      </p:tgtEl>
+                    </p:cond>
+                  </p:endCondLst>
+                </p:cTn>
+                <p:tgtEl>
+                  <p:spTgt spid="5"/>
                 </p:tgtEl>
               </p:cMediaNode>
             </p:audio>
@@ -37201,246 +37240,6 @@
       <p:grpSpPr/>
       <p:pic>
         <p:nvPicPr>
-          <p:cNvPr id="2" name="Picture 1" descr="bg_section.png"/>
-          <p:cNvPicPr>
-            <a:picLocks noChangeAspect="1"/>
-          </p:cNvPicPr>
-          <p:nvPr/>
-        </p:nvPicPr>
-        <p:blipFill>
-          <a:blip r:embed="rId2"/>
-          <a:stretch>
-            <a:fillRect/>
-          </a:stretch>
-        </p:blipFill>
-        <p:spPr>
-          <a:xfrm>
-            <a:off x="0" y="0"/>
-            <a:ext cx="12192000" cy="6858000"/>
-          </a:xfrm>
-          <a:prstGeom prst="rect">
-            <a:avLst/>
-          </a:prstGeom>
-        </p:spPr>
-      </p:pic>
-      <p:sp>
-        <p:nvSpPr>
-          <p:cNvPr id="3" name="TextBox 2"/>
-          <p:cNvSpPr txBox="1"/>
-          <p:nvPr/>
-        </p:nvSpPr>
-        <p:spPr>
-          <a:xfrm>
-            <a:off x="900000" y="2150000"/>
-            <a:ext cx="10392000" cy="1450000"/>
-          </a:xfrm>
-          <a:prstGeom prst="rect">
-            <a:avLst/>
-          </a:prstGeom>
-          <a:noFill/>
-        </p:spPr>
-        <p:txBody>
-          <a:bodyPr wrap="square" anchor="ctr" lIns="90000" rIns="90000" tIns="45000" bIns="45000">
-            <a:spAutoFit/>
-          </a:bodyPr>
-          <a:lstStyle/>
-          <a:p>
-            <a:pPr algn="ctr">
-              <a:lnSpc>
-                <a:spcPct val="118000"/>
-              </a:lnSpc>
-            </a:pPr>
-            <a:r>
-              <a:rPr sz="5600" b="1" lang="ja-JP" altLang="en-US">
-                <a:solidFill>
-                  <a:srgbClr val="FFFFFF"/>
-                </a:solidFill>
-                <a:latin typeface="Meiryo"/>
-              </a:rPr>
-              <a:t>ビンゴ大会</a:t>
-            </a:r>
-          </a:p>
-        </p:txBody>
-      </p:sp>
-      <p:sp>
-        <p:nvSpPr>
-          <p:cNvPr id="4" name="TextBox 3"/>
-          <p:cNvSpPr txBox="1"/>
-          <p:nvPr/>
-        </p:nvSpPr>
-        <p:spPr>
-          <a:xfrm>
-            <a:off x="900000" y="3750000"/>
-            <a:ext cx="10392000" cy="700000"/>
-          </a:xfrm>
-          <a:prstGeom prst="rect">
-            <a:avLst/>
-          </a:prstGeom>
-          <a:noFill/>
-        </p:spPr>
-        <p:txBody>
-          <a:bodyPr wrap="square" anchor="ctr" lIns="90000" rIns="90000" tIns="45000" bIns="45000">
-            <a:spAutoFit/>
-          </a:bodyPr>
-          <a:lstStyle/>
-          <a:p>
-            <a:pPr algn="ctr">
-              <a:lnSpc>
-                <a:spcPct val="118000"/>
-              </a:lnSpc>
-            </a:pPr>
-            <a:r>
-              <a:rPr sz="2200" b="0" lang="ja-JP" altLang="en-US">
-                <a:solidFill>
-                  <a:srgbClr val="F6DFC8"/>
-                </a:solidFill>
-                <a:latin typeface="Meiryo"/>
-              </a:rPr>
-              <a:t>お手元のカードをご用意ください🎱</a:t>
-            </a:r>
-          </a:p>
-        </p:txBody>
-      </p:sp>
-      <p:pic>
-        <p:nvPicPr>
-          <p:cNvPr id="5" name="セクション効果音">
-            <a:hlinkClick r:id="" action="ppaction://media"/>
-          </p:cNvPr>
-          <p:cNvPicPr>
-            <a:picLocks noChangeAspect="1"/>
-          </p:cNvPicPr>
-          <p:nvPr>
-            <a:audioFile r:link="rId4"/>
-            <p:extLst>
-              <p:ext uri="{DAA4B4D4-6D71-4841-9C94-3DE7FCFB9230}">
-                <p14:media xmlns:p14="http://schemas.microsoft.com/office/powerpoint/2010/main" r:embed="rId3"/>
-              </p:ext>
-            </p:extLst>
-          </p:nvPr>
-        </p:nvPicPr>
-        <p:blipFill>
-          <a:blip r:embed="rId5"/>
-          <a:stretch>
-            <a:fillRect/>
-          </a:stretch>
-        </p:blipFill>
-        <p:spPr>
-          <a:xfrm>
-            <a:off x="-900000" y="200000"/>
-            <a:ext cx="406400" cy="406400"/>
-          </a:xfrm>
-          <a:prstGeom prst="rect">
-            <a:avLst/>
-          </a:prstGeom>
-        </p:spPr>
-      </p:pic>
-    </p:spTree>
-  </p:cSld>
-  <p:clrMapOvr>
-    <a:masterClrMapping/>
-  </p:clrMapOvr>
-  <p:transition spd="med">
-    <p:fade/>
-  </p:transition>
-  <p:timing>
-    <p:tnLst>
-      <p:par>
-        <p:cTn id="1" dur="indefinite" restart="never" nodeType="tmRoot">
-          <p:childTnLst>
-            <p:seq concurrent="1" nextAc="seek">
-              <p:cTn id="2" dur="indefinite" nodeType="mainSeq">
-                <p:childTnLst>
-                  <p:par>
-                    <p:cTn id="3" fill="hold">
-                      <p:stCondLst>
-                        <p:cond delay="0"/>
-                      </p:stCondLst>
-                      <p:childTnLst>
-                        <p:par>
-                          <p:cTn id="4" fill="hold">
-                            <p:stCondLst>
-                              <p:cond delay="0"/>
-                            </p:stCondLst>
-                            <p:childTnLst>
-                              <p:par>
-                                <p:cTn id="5" presetID="1" presetClass="mediacall" presetSubtype="0" fill="hold" nodeType="clickEffect">
-                                  <p:stCondLst>
-                                    <p:cond delay="0"/>
-                                  </p:stCondLst>
-                                  <p:childTnLst>
-                                    <p:cmd type="call" cmd="playFrom(0.0)">
-                                      <p:cBhvr>
-                                        <p:cTn id="6" dur="8710" fill="hold"/>
-                                        <p:tgtEl>
-                                          <p:spTgt spid="5"/>
-                                        </p:tgtEl>
-                                      </p:cBhvr>
-                                    </p:cmd>
-                                  </p:childTnLst>
-                                </p:cTn>
-                              </p:par>
-                            </p:childTnLst>
-                          </p:cTn>
-                        </p:par>
-                      </p:childTnLst>
-                    </p:cTn>
-                  </p:par>
-                </p:childTnLst>
-              </p:cTn>
-              <p:prevCondLst>
-                <p:cond evt="onPrev" delay="0">
-                  <p:tgtEl>
-                    <p:sldTgt/>
-                  </p:tgtEl>
-                </p:cond>
-              </p:prevCondLst>
-              <p:nextCondLst>
-                <p:cond evt="onNext" delay="0">
-                  <p:tgtEl>
-                    <p:sldTgt/>
-                  </p:tgtEl>
-                </p:cond>
-              </p:nextCondLst>
-            </p:seq>
-            <p:audio>
-              <p:cMediaNode vol="80000">
-                <p:cTn id="7" fill="hold" display="0">
-                  <p:stCondLst>
-                    <p:cond delay="indefinite"/>
-                  </p:stCondLst>
-                  <p:endCondLst>
-                    <p:cond evt="onStopAudio" delay="0">
-                      <p:tgtEl>
-                        <p:sldTgt/>
-                      </p:tgtEl>
-                    </p:cond>
-                  </p:endCondLst>
-                </p:cTn>
-                <p:tgtEl>
-                  <p:spTgt spid="5"/>
-                </p:tgtEl>
-              </p:cMediaNode>
-            </p:audio>
-          </p:childTnLst>
-        </p:cTn>
-      </p:par>
-    </p:tnLst>
-  </p:timing>
-</p:sld>
-</file>
-
-<file path=ppt/slides/slide41.xml><?xml version="1.0" encoding="utf-8"?>
-<p:sld xmlns:a="http://schemas.openxmlformats.org/drawingml/2006/main" xmlns:p="http://schemas.openxmlformats.org/presentationml/2006/main" xmlns:r="http://schemas.openxmlformats.org/officeDocument/2006/relationships">
-  <p:cSld>
-    <p:spTree>
-      <p:nvGrpSpPr>
-        <p:cNvPr id="1" name=""/>
-        <p:cNvGrpSpPr/>
-        <p:nvPr/>
-      </p:nvGrpSpPr>
-      <p:grpSpPr/>
-      <p:pic>
-        <p:nvPicPr>
           <p:cNvPr id="2" name="Picture 1" descr="bg_bingo.png"/>
           <p:cNvPicPr>
             <a:picLocks noChangeAspect="1"/>
@@ -37778,7 +37577,7 @@
 </p:sld>
 </file>
 
-<file path=ppt/slides/slide42.xml><?xml version="1.0" encoding="utf-8"?>
+<file path=ppt/slides/slide41.xml><?xml version="1.0" encoding="utf-8"?>
 <p:sld xmlns:a="http://schemas.openxmlformats.org/drawingml/2006/main" xmlns:p="http://schemas.openxmlformats.org/presentationml/2006/main" xmlns:r="http://schemas.openxmlformats.org/officeDocument/2006/relationships">
   <p:cSld>
     <p:spTree>
@@ -38095,7 +37894,7 @@
 </p:sld>
 </file>
 
-<file path=ppt/slides/slide43.xml><?xml version="1.0" encoding="utf-8"?>
+<file path=ppt/slides/slide42.xml><?xml version="1.0" encoding="utf-8"?>
 <p:sld xmlns:a="http://schemas.openxmlformats.org/drawingml/2006/main" xmlns:p="http://schemas.openxmlformats.org/presentationml/2006/main" xmlns:r="http://schemas.openxmlformats.org/officeDocument/2006/relationships">
   <p:cSld>
     <p:spTree>
@@ -38412,7 +38211,7 @@
 </p:sld>
 </file>
 
-<file path=ppt/slides/slide44.xml><?xml version="1.0" encoding="utf-8"?>
+<file path=ppt/slides/slide43.xml><?xml version="1.0" encoding="utf-8"?>
 <p:sld xmlns:a="http://schemas.openxmlformats.org/drawingml/2006/main" xmlns:p="http://schemas.openxmlformats.org/presentationml/2006/main" xmlns:r="http://schemas.openxmlformats.org/officeDocument/2006/relationships">
   <p:cSld>
     <p:spTree>
@@ -38713,7 +38512,7 @@
 </p:sld>
 </file>
 
-<file path=ppt/slides/slide45.xml><?xml version="1.0" encoding="utf-8"?>
+<file path=ppt/slides/slide44.xml><?xml version="1.0" encoding="utf-8"?>
 <p:sld xmlns:a="http://schemas.openxmlformats.org/drawingml/2006/main" xmlns:p="http://schemas.openxmlformats.org/presentationml/2006/main" xmlns:r="http://schemas.openxmlformats.org/officeDocument/2006/relationships">
   <p:cSld>
     <p:spTree>
@@ -38813,7 +38612,7 @@
 </p:sld>
 </file>
 
-<file path=ppt/slides/slide46.xml><?xml version="1.0" encoding="utf-8"?>
+<file path=ppt/slides/slide45.xml><?xml version="1.0" encoding="utf-8"?>
 <p:sld xmlns:a="http://schemas.openxmlformats.org/drawingml/2006/main" xmlns:p="http://schemas.openxmlformats.org/presentationml/2006/main" xmlns:r="http://schemas.openxmlformats.org/officeDocument/2006/relationships">
   <p:cSld>
     <p:spTree>

--- a/wedding-deck/build/結婚式_2択クイズ＆ビンゴ.pptx
+++ b/wedding-deck/build/結婚式_2択クイズ＆ビンゴ.pptx
@@ -2930,7 +2930,7 @@
           </a:p>
           <a:p>
             <a:r>
-              <a:t>正解：左 「台風 15 号」</a:t>
+              <a:t>正解：左 「台風 18 号」</a:t>
             </a:r>
           </a:p>
           <a:p>
@@ -2951,7 +2951,7 @@
           <a:p/>
           <a:p>
             <a:r>
-              <a:t>号数は仮で 15号／18号 にしています。当日の実際の号数に合わせてください。</a:t>
+              <a:t>正解は台風18号。ダミーは一つ前の17号にしています。</a:t>
             </a:r>
           </a:p>
         </p:txBody>
@@ -3021,7 +3021,7 @@
           <a:lstStyle/>
           <a:p>
             <a:r>
-              <a:t>【第2問】正解：左 「台風 15 号」</a:t>
+              <a:t>【第2問】正解：左 「台風 18 号」</a:t>
             </a:r>
           </a:p>
           <a:p>
@@ -9265,7 +9265,7 @@
                 </a:solidFill>
                 <a:latin typeface="Meiryo"/>
               </a:rPr>
-              <a:t>台風 15 号</a:t>
+              <a:t>台風 18 号</a:t>
             </a:r>
           </a:p>
         </p:txBody>
@@ -9435,7 +9435,7 @@
                 </a:solidFill>
                 <a:latin typeface="Meiryo"/>
               </a:rPr>
-              <a:t>台風 18 号</a:t>
+              <a:t>台風 17 号</a:t>
             </a:r>
           </a:p>
         </p:txBody>
@@ -10949,7 +10949,7 @@
                 </a:solidFill>
                 <a:latin typeface="Meiryo"/>
               </a:rPr>
-              <a:t>台風 15 号</a:t>
+              <a:t>台風 18 号</a:t>
             </a:r>
           </a:p>
         </p:txBody>
